--- a/inbox/Application Aware Networking/Vol_IX_Book_03_FedAAN_App_Registration_Governance.pptx
+++ b/inbox/Application Aware Networking/Vol_IX_Book_03_FedAAN_App_Registration_Governance.pptx
@@ -9244,7 +9244,7 @@
                 <a:gridCol w="2743200"/>
                 <a:gridCol w="2743200"/>
               </a:tblGrid>
-              <a:tr h="685800">
+              <a:tr h="548640">
                 <a:tc>
                   <a:txBody>
                     <a:bodyPr/>
@@ -9312,7 +9312,7 @@
                   </a:tcPr>
                 </a:tc>
               </a:tr>
-              <a:tr h="685800">
+              <a:tr h="548640">
                 <a:tc>
                   <a:txBody>
                     <a:bodyPr/>
@@ -9325,7 +9325,7 @@
                           </a:solidFill>
                           <a:latin typeface="Arial"/>
                         </a:rPr>
-                        <a:t>IA-5(2)</a:t>
+                        <a:t>AC-2</a:t>
                       </a:r>
                     </a:p>
                   </a:txBody>
@@ -9347,7 +9347,7 @@
                           </a:solidFill>
                           <a:latin typeface="Arial"/>
                         </a:rPr>
-                        <a:t>Public Key-Based Authentication</a:t>
+                        <a:t>Account Management</a:t>
                       </a:r>
                     </a:p>
                   </a:txBody>
@@ -9369,7 +9369,7 @@
                           </a:solidFill>
                           <a:latin typeface="Arial"/>
                         </a:rPr>
-                        <a:t>Short-lived certs (ACME), mandatory expiry, automated rotation</a:t>
+                        <a:t>App registrations as machine JML: governed request captures owner, purpose, scopes; orphaned registrations retired via attestation</a:t>
                       </a:r>
                     </a:p>
                   </a:txBody>
@@ -9380,7 +9380,7 @@
                   </a:tcPr>
                 </a:tc>
               </a:tr>
-              <a:tr h="685800">
+              <a:tr h="548640">
                 <a:tc>
                   <a:txBody>
                     <a:bodyPr/>
@@ -9393,7 +9393,7 @@
                           </a:solidFill>
                           <a:latin typeface="Arial"/>
                         </a:rPr>
-                        <a:t>SC-17</a:t>
+                        <a:t>IA-5(2)</a:t>
                       </a:r>
                     </a:p>
                   </a:txBody>
@@ -9415,7 +9415,7 @@
                           </a:solidFill>
                           <a:latin typeface="Arial"/>
                         </a:rPr>
-                        <a:t>PKI Certificates</a:t>
+                        <a:t>Public Key-Based Authentication</a:t>
                       </a:r>
                     </a:p>
                   </a:txBody>
@@ -9437,7 +9437,7 @@
                           </a:solidFill>
                           <a:latin typeface="Arial"/>
                         </a:rPr>
-                        <a:t>Certificate issuance/rotation for service principals via the catalog</a:t>
+                        <a:t>Short-lived certs (ACME), mandatory expiry, automated rotation</a:t>
                       </a:r>
                     </a:p>
                   </a:txBody>
@@ -9448,7 +9448,7 @@
                   </a:tcPr>
                 </a:tc>
               </a:tr>
-              <a:tr h="685800">
+              <a:tr h="548640">
                 <a:tc>
                   <a:txBody>
                     <a:bodyPr/>
@@ -9461,7 +9461,7 @@
                           </a:solidFill>
                           <a:latin typeface="Arial"/>
                         </a:rPr>
-                        <a:t>AC-6</a:t>
+                        <a:t>SC-17</a:t>
                       </a:r>
                     </a:p>
                   </a:txBody>
@@ -9483,7 +9483,7 @@
                           </a:solidFill>
                           <a:latin typeface="Arial"/>
                         </a:rPr>
-                        <a:t>Least Privilege</a:t>
+                        <a:t>Public Key Infrastructure Certificates</a:t>
                       </a:r>
                     </a:p>
                   </a:txBody>
@@ -9505,13 +9505,81 @@
                           </a:solidFill>
                           <a:latin typeface="Arial"/>
                         </a:rPr>
+                        <a:t>Certificate issuance/rotation for service principals via the catalog</a:t>
+                      </a:r>
+                    </a:p>
+                  </a:txBody>
+                  <a:tcPr anchor="ctr">
+                    <a:solidFill>
+                      <a:srgbClr val="E6F5F2"/>
+                    </a:solidFill>
+                  </a:tcPr>
+                </a:tc>
+              </a:tr>
+              <a:tr h="548640">
+                <a:tc>
+                  <a:txBody>
+                    <a:bodyPr/>
+                    <a:lstStyle/>
+                    <a:p>
+                      <a:r>
+                        <a:rPr sz="900" b="1">
+                          <a:solidFill>
+                            <a:srgbClr val="1F3A5F"/>
+                          </a:solidFill>
+                          <a:latin typeface="Arial"/>
+                        </a:rPr>
+                        <a:t>AC-6</a:t>
+                      </a:r>
+                    </a:p>
+                  </a:txBody>
+                  <a:tcPr anchor="ctr">
+                    <a:solidFill>
+                      <a:srgbClr val="FFFFFF"/>
+                    </a:solidFill>
+                  </a:tcPr>
+                </a:tc>
+                <a:tc>
+                  <a:txBody>
+                    <a:bodyPr/>
+                    <a:lstStyle/>
+                    <a:p>
+                      <a:r>
+                        <a:rPr sz="900">
+                          <a:solidFill>
+                            <a:srgbClr val="1E293B"/>
+                          </a:solidFill>
+                          <a:latin typeface="Arial"/>
+                        </a:rPr>
+                        <a:t>Least Privilege</a:t>
+                      </a:r>
+                    </a:p>
+                  </a:txBody>
+                  <a:tcPr anchor="ctr">
+                    <a:solidFill>
+                      <a:srgbClr val="FFFFFF"/>
+                    </a:solidFill>
+                  </a:tcPr>
+                </a:tc>
+                <a:tc>
+                  <a:txBody>
+                    <a:bodyPr/>
+                    <a:lstStyle/>
+                    <a:p>
+                      <a:r>
+                        <a:rPr sz="900">
+                          <a:solidFill>
+                            <a:srgbClr val="1E293B"/>
+                          </a:solidFill>
+                          <a:latin typeface="Arial"/>
+                        </a:rPr>
                         <a:t>Scoped consent; privileged scopes security-approved; orphaned/expired flagged</a:t>
                       </a:r>
                     </a:p>
                   </a:txBody>
                   <a:tcPr anchor="ctr">
                     <a:solidFill>
-                      <a:srgbClr val="E6F5F2"/>
+                      <a:srgbClr val="FFFFFF"/>
                     </a:solidFill>
                   </a:tcPr>
                 </a:tc>

--- a/inbox/Application Aware Networking/Vol_IX_Book_03_FedAAN_App_Registration_Governance.pptx
+++ b/inbox/Application Aware Networking/Vol_IX_Book_03_FedAAN_App_Registration_Governance.pptx
@@ -509,7 +509,7 @@
           <a:lstStyle/>
           <a:p>
             <a:r>
-              <a:t>Book 03 governs app registrations — the machine analogue of the joiner/mover/leaver lifecycle, and the largest source of long-lived-secret and over-consent risk in an Entra estate. The architecture is set (Vol I Book 03, Vol VI Book 02); this book adds the governed lifecycle: request, scoped consent, short-lived credentials, automated rotation, and attestation. GCC Moderate throughout.</a:t>
+              <a:t>Book 03 governs app registrations — the machine analogue of the joiner/mover/leaver lifecycle, and the largest source of long-lived-secret and over-consent risk in an Entra estate. The architecture is set (Vol I Book 03, Vol VI Book 02); this book adds the governed lifecycle: request, scoped consent, short-lived credentials, owner-approved rotation, and attestation. GCC Moderate throughout.</a:t>
             </a:r>
           </a:p>
         </p:txBody>
@@ -801,7 +801,7 @@
           <a:lstStyle/>
           <a:p>
             <a:r>
-              <a:t>Step three is the single highest-value rule: no long-lived secrets. A client secret with a two-year expiry in a pipeline variable is the credential an attacker wants most; certificate- based, auto-rotated identity removes the target.</a:t>
+              <a:t>Step three is the single highest-value rule: no long-lived secrets. A client secret with a two-year expiry in a pipeline variable is the credential an attacker wants most; certificate- based, short-lived identity removes the target.</a:t>
             </a:r>
           </a:p>
           <a:p/>
@@ -877,7 +877,7 @@
           <a:lstStyle/>
           <a:p>
             <a:r>
-              <a:t>Step four: rotation never depends on a human remembering, and attestation is the machine-identity access review.</a:t>
+              <a:t>Step four: rotation is raised on a schedule and the owner approves it — the app never depends on a human remembering — and attestation is the machine-identity access review.</a:t>
             </a:r>
           </a:p>
           <a:p/>
@@ -1029,7 +1029,7 @@
           <a:lstStyle/>
           <a:p>
             <a:r>
-              <a:t>Close on the honest limit: not every app supports certificate credentials; where a secret is unavoidable, the expiry is short and rotation still automated, and the exception is documented. Hand off to Book 04.</a:t>
+              <a:t>Close on the honest limit: not every app supports certificate credentials; where a secret is unavoidable, the expiry is short and rotation is still scheduled and owner-approved, and the exception is documented. Hand off to Book 04.</a:t>
             </a:r>
           </a:p>
         </p:txBody>
@@ -4794,7 +4794,7 @@
                 </a:solidFill>
                 <a:latin typeface="Arial"/>
               </a:rPr>
-              <a:t>Date Code: 2026-07-12 15:00 ET</a:t>
+              <a:t>Date Code: 2026-07-16 09:48 ET</a:t>
             </a:r>
           </a:p>
         </p:txBody>
@@ -4982,7 +4982,7 @@
                 </a:solidFill>
                 <a:latin typeface="Arial"/>
               </a:rPr>
-              <a:t>App Registration Governance · Date Code: 2026-07-12 15:00 ET</a:t>
+              <a:t>App Registration Governance · Date Code: 2026-07-16 09:48 ET</a:t>
             </a:r>
           </a:p>
         </p:txBody>
@@ -5205,7 +5205,7 @@
                 </a:solidFill>
                 <a:latin typeface="Arial"/>
               </a:rPr>
-              <a:t>App Registration Governance · Date Code: 2026-07-12 15:00 ET</a:t>
+              <a:t>App Registration Governance · Date Code: 2026-07-16 09:48 ET</a:t>
             </a:r>
           </a:p>
         </p:txBody>
@@ -6199,7 +6199,7 @@
                 </a:solidFill>
                 <a:latin typeface="Arial"/>
               </a:rPr>
-              <a:t>App Registration Governance · Date Code: 2026-07-12 15:00 ET</a:t>
+              <a:t>App Registration Governance · Date Code: 2026-07-16 09:48 ET</a:t>
             </a:r>
           </a:p>
         </p:txBody>
@@ -7193,7 +7193,7 @@
                 </a:solidFill>
                 <a:latin typeface="Arial"/>
               </a:rPr>
-              <a:t>App Registration Governance · Date Code: 2026-07-12 15:00 ET</a:t>
+              <a:t>App Registration Governance · Date Code: 2026-07-16 09:48 ET</a:t>
             </a:r>
           </a:p>
         </p:txBody>
@@ -8187,7 +8187,7 @@
                 </a:solidFill>
                 <a:latin typeface="Arial"/>
               </a:rPr>
-              <a:t>App Registration Governance · Date Code: 2026-07-12 15:00 ET</a:t>
+              <a:t>App Registration Governance · Date Code: 2026-07-16 09:48 ET</a:t>
             </a:r>
           </a:p>
         </p:txBody>
@@ -9049,7 +9049,7 @@
                 </a:solidFill>
                 <a:latin typeface="Arial"/>
               </a:rPr>
-              <a:t>Automated rotation before expiry, and ownership and scope re-attested on a cadence; orphaned or expired registrations are flagged (feeds Vol VII Book 04, CA-7).
+              <a:t>Rotation is raised automatically before expiry and approved by the owner; ownership and scope are re-attested on a cadence; orphaned or expired registrations are flagged (feeds Vol VII Book 04, CA-7).
 </a:t>
             </a:r>
           </a:p>
@@ -9181,7 +9181,7 @@
                 </a:solidFill>
                 <a:latin typeface="Arial"/>
               </a:rPr>
-              <a:t>App Registration Governance · Date Code: 2026-07-12 15:00 ET</a:t>
+              <a:t>App Registration Governance · Date Code: 2026-07-16 09:48 ET</a:t>
             </a:r>
           </a:p>
         </p:txBody>
@@ -9437,7 +9437,7 @@
                           </a:solidFill>
                           <a:latin typeface="Arial"/>
                         </a:rPr>
-                        <a:t>Short-lived certs (ACME), mandatory expiry, automated rotation</a:t>
+                        <a:t>Short-lived certs (ACME), mandatory expiry, scheduled owner-approved rotation</a:t>
                       </a:r>
                     </a:p>
                   </a:txBody>
@@ -9771,7 +9771,7 @@
                 </a:solidFill>
                 <a:latin typeface="Arial"/>
               </a:rPr>
-              <a:t>App Registration Governance · Date Code: 2026-07-12 15:00 ET</a:t>
+              <a:t>App Registration Governance · Date Code: 2026-07-16 09:48 ET</a:t>
             </a:r>
           </a:p>
         </p:txBody>
@@ -10203,7 +10203,7 @@
                 </a:solidFill>
                 <a:latin typeface="Arial"/>
               </a:rPr>
-              <a:t>Certificate-based, auto-rotated credentials with mandatory expiry.</a:t>
+              <a:t>Certificate-based, short-lived credentials with mandatory expiry.</a:t>
             </a:r>
           </a:p>
         </p:txBody>
